--- a/HW2/ER_MODEL.pptx
+++ b/HW2/ER_MODEL.pptx
@@ -104,6 +104,11 @@
       </a:defRPr>
     </a:lvl9pPr>
   </p:defaultTextStyle>
+  <p:extLst>
+    <p:ext uri="{EFAFB233-063F-42B5-8137-9DF3F51BA10A}">
+      <p15:sldGuideLst xmlns:p15="http://schemas.microsoft.com/office/powerpoint/2012/main"/>
+    </p:ext>
+  </p:extLst>
 </p:presentation>
 </file>
 
@@ -254,7 +259,7 @@
           <a:p>
             <a:fld id="{495DE6E0-3024-417E-BD8D-AE5FC7E40CD6}" type="datetimeFigureOut">
               <a:rPr lang="zh-TW" altLang="en-US" smtClean="0"/>
-              <a:t>2024/10/29</a:t>
+              <a:t>2024/11/9</a:t>
             </a:fld>
             <a:endParaRPr lang="zh-TW" altLang="en-US"/>
           </a:p>
@@ -452,7 +457,7 @@
           <a:p>
             <a:fld id="{495DE6E0-3024-417E-BD8D-AE5FC7E40CD6}" type="datetimeFigureOut">
               <a:rPr lang="zh-TW" altLang="en-US" smtClean="0"/>
-              <a:t>2024/10/29</a:t>
+              <a:t>2024/11/9</a:t>
             </a:fld>
             <a:endParaRPr lang="zh-TW" altLang="en-US"/>
           </a:p>
@@ -660,7 +665,7 @@
           <a:p>
             <a:fld id="{495DE6E0-3024-417E-BD8D-AE5FC7E40CD6}" type="datetimeFigureOut">
               <a:rPr lang="zh-TW" altLang="en-US" smtClean="0"/>
-              <a:t>2024/10/29</a:t>
+              <a:t>2024/11/9</a:t>
             </a:fld>
             <a:endParaRPr lang="zh-TW" altLang="en-US"/>
           </a:p>
@@ -858,7 +863,7 @@
           <a:p>
             <a:fld id="{495DE6E0-3024-417E-BD8D-AE5FC7E40CD6}" type="datetimeFigureOut">
               <a:rPr lang="zh-TW" altLang="en-US" smtClean="0"/>
-              <a:t>2024/10/29</a:t>
+              <a:t>2024/11/9</a:t>
             </a:fld>
             <a:endParaRPr lang="zh-TW" altLang="en-US"/>
           </a:p>
@@ -1133,7 +1138,7 @@
           <a:p>
             <a:fld id="{495DE6E0-3024-417E-BD8D-AE5FC7E40CD6}" type="datetimeFigureOut">
               <a:rPr lang="zh-TW" altLang="en-US" smtClean="0"/>
-              <a:t>2024/10/29</a:t>
+              <a:t>2024/11/9</a:t>
             </a:fld>
             <a:endParaRPr lang="zh-TW" altLang="en-US"/>
           </a:p>
@@ -1398,7 +1403,7 @@
           <a:p>
             <a:fld id="{495DE6E0-3024-417E-BD8D-AE5FC7E40CD6}" type="datetimeFigureOut">
               <a:rPr lang="zh-TW" altLang="en-US" smtClean="0"/>
-              <a:t>2024/10/29</a:t>
+              <a:t>2024/11/9</a:t>
             </a:fld>
             <a:endParaRPr lang="zh-TW" altLang="en-US"/>
           </a:p>
@@ -1810,7 +1815,7 @@
           <a:p>
             <a:fld id="{495DE6E0-3024-417E-BD8D-AE5FC7E40CD6}" type="datetimeFigureOut">
               <a:rPr lang="zh-TW" altLang="en-US" smtClean="0"/>
-              <a:t>2024/10/29</a:t>
+              <a:t>2024/11/9</a:t>
             </a:fld>
             <a:endParaRPr lang="zh-TW" altLang="en-US"/>
           </a:p>
@@ -1951,7 +1956,7 @@
           <a:p>
             <a:fld id="{495DE6E0-3024-417E-BD8D-AE5FC7E40CD6}" type="datetimeFigureOut">
               <a:rPr lang="zh-TW" altLang="en-US" smtClean="0"/>
-              <a:t>2024/10/29</a:t>
+              <a:t>2024/11/9</a:t>
             </a:fld>
             <a:endParaRPr lang="zh-TW" altLang="en-US"/>
           </a:p>
@@ -2064,7 +2069,7 @@
           <a:p>
             <a:fld id="{495DE6E0-3024-417E-BD8D-AE5FC7E40CD6}" type="datetimeFigureOut">
               <a:rPr lang="zh-TW" altLang="en-US" smtClean="0"/>
-              <a:t>2024/10/29</a:t>
+              <a:t>2024/11/9</a:t>
             </a:fld>
             <a:endParaRPr lang="zh-TW" altLang="en-US"/>
           </a:p>
@@ -2375,7 +2380,7 @@
           <a:p>
             <a:fld id="{495DE6E0-3024-417E-BD8D-AE5FC7E40CD6}" type="datetimeFigureOut">
               <a:rPr lang="zh-TW" altLang="en-US" smtClean="0"/>
-              <a:t>2024/10/29</a:t>
+              <a:t>2024/11/9</a:t>
             </a:fld>
             <a:endParaRPr lang="zh-TW" altLang="en-US"/>
           </a:p>
@@ -2663,7 +2668,7 @@
           <a:p>
             <a:fld id="{495DE6E0-3024-417E-BD8D-AE5FC7E40CD6}" type="datetimeFigureOut">
               <a:rPr lang="zh-TW" altLang="en-US" smtClean="0"/>
-              <a:t>2024/10/29</a:t>
+              <a:t>2024/11/9</a:t>
             </a:fld>
             <a:endParaRPr lang="zh-TW" altLang="en-US"/>
           </a:p>
@@ -2904,7 +2909,7 @@
           <a:p>
             <a:fld id="{495DE6E0-3024-417E-BD8D-AE5FC7E40CD6}" type="datetimeFigureOut">
               <a:rPr lang="zh-TW" altLang="en-US" smtClean="0"/>
-              <a:t>2024/10/29</a:t>
+              <a:t>2024/11/9</a:t>
             </a:fld>
             <a:endParaRPr lang="zh-TW" altLang="en-US"/>
           </a:p>
@@ -3541,7 +3546,7 @@
         </p:nvGrpSpPr>
         <p:grpSpPr>
           <a:xfrm>
-            <a:off x="8927073" y="550609"/>
+            <a:off x="8914126" y="682828"/>
             <a:ext cx="1909666" cy="1001486"/>
             <a:chOff x="1530220" y="3551853"/>
             <a:chExt cx="1909666" cy="1001486"/>
@@ -4278,7 +4283,7 @@
         </p:nvCxnSpPr>
         <p:spPr>
           <a:xfrm flipH="1">
-            <a:off x="9717350" y="1552095"/>
+            <a:off x="9704403" y="1684314"/>
             <a:ext cx="164556" cy="760538"/>
           </a:xfrm>
           <a:prstGeom prst="straightConnector1">
@@ -5372,15 +5377,14 @@
           </p:cNvPr>
           <p:cNvCxnSpPr>
             <a:cxnSpLocks/>
-            <a:stCxn id="8" idx="1"/>
             <a:endCxn id="4" idx="3"/>
           </p:cNvCxnSpPr>
           <p:nvPr/>
         </p:nvCxnSpPr>
         <p:spPr>
-          <a:xfrm flipH="1" flipV="1">
+          <a:xfrm flipH="1">
             <a:off x="2985796" y="1139116"/>
-            <a:ext cx="1776322" cy="39757"/>
+            <a:ext cx="785716" cy="0"/>
           </a:xfrm>
           <a:prstGeom prst="straightConnector1">
             <a:avLst/>
@@ -5415,14 +5419,15 @@
           </p:cNvPr>
           <p:cNvCxnSpPr>
             <a:cxnSpLocks/>
+            <a:stCxn id="8" idx="3"/>
             <a:endCxn id="14" idx="1"/>
           </p:cNvCxnSpPr>
           <p:nvPr/>
         </p:nvCxnSpPr>
         <p:spPr>
-          <a:xfrm flipV="1">
-            <a:off x="6681884" y="1051352"/>
-            <a:ext cx="2245189" cy="127521"/>
+          <a:xfrm>
+            <a:off x="6671784" y="1178873"/>
+            <a:ext cx="2242342" cy="4698"/>
           </a:xfrm>
           <a:prstGeom prst="straightConnector1">
             <a:avLst/>
@@ -5460,7 +5465,7 @@
         </p:nvSpPr>
         <p:spPr>
           <a:xfrm>
-            <a:off x="2985795" y="881995"/>
+            <a:off x="3396922" y="862117"/>
             <a:ext cx="609600" cy="276999"/>
           </a:xfrm>
           <a:prstGeom prst="rect">
@@ -5496,7 +5501,7 @@
         </p:nvSpPr>
         <p:spPr>
           <a:xfrm>
-            <a:off x="4469754" y="866686"/>
+            <a:off x="2967489" y="1212111"/>
             <a:ext cx="609600" cy="276999"/>
           </a:xfrm>
           <a:prstGeom prst="rect">
@@ -5513,42 +5518,6 @@
             <a:r>
               <a:rPr lang="en-US" altLang="zh-TW" sz="1200" dirty="0"/>
               <a:t>n</a:t>
-            </a:r>
-            <a:endParaRPr lang="zh-TW" altLang="en-US" sz="1200" dirty="0"/>
-          </a:p>
-        </p:txBody>
-      </p:sp>
-      <p:sp>
-        <p:nvSpPr>
-          <p:cNvPr id="121" name="文字方塊 120">
-            <a:extLst>
-              <a:ext uri="{FF2B5EF4-FFF2-40B4-BE49-F238E27FC236}">
-                <a16:creationId xmlns:a16="http://schemas.microsoft.com/office/drawing/2014/main" id="{C99C71E0-BA5A-4533-B05E-8295E98B437A}"/>
-              </a:ext>
-            </a:extLst>
-          </p:cNvPr>
-          <p:cNvSpPr txBox="1"/>
-          <p:nvPr/>
-        </p:nvSpPr>
-        <p:spPr>
-          <a:xfrm>
-            <a:off x="8612173" y="810054"/>
-            <a:ext cx="609600" cy="276999"/>
-          </a:xfrm>
-          <a:prstGeom prst="rect">
-            <a:avLst/>
-          </a:prstGeom>
-          <a:noFill/>
-        </p:spPr>
-        <p:txBody>
-          <a:bodyPr wrap="square" rtlCol="0">
-            <a:spAutoFit/>
-          </a:bodyPr>
-          <a:lstStyle/>
-          <a:p>
-            <a:r>
-              <a:rPr lang="en-US" altLang="zh-TW" sz="1200" dirty="0"/>
-              <a:t>1</a:t>
             </a:r>
             <a:endParaRPr lang="zh-TW" altLang="en-US" sz="1200" dirty="0"/>
           </a:p>
@@ -5660,6 +5629,47 @@
           </a:p>
         </p:txBody>
       </p:sp>
+      <p:cxnSp>
+        <p:nvCxnSpPr>
+          <p:cNvPr id="64" name="直線單箭頭接點 63">
+            <a:extLst>
+              <a:ext uri="{FF2B5EF4-FFF2-40B4-BE49-F238E27FC236}">
+                <a16:creationId xmlns:a16="http://schemas.microsoft.com/office/drawing/2014/main" id="{28152F31-6CDB-4402-914C-57AFB9627EA9}"/>
+              </a:ext>
+            </a:extLst>
+          </p:cNvPr>
+          <p:cNvCxnSpPr>
+            <a:cxnSpLocks/>
+          </p:cNvCxnSpPr>
+          <p:nvPr/>
+        </p:nvCxnSpPr>
+        <p:spPr>
+          <a:xfrm>
+            <a:off x="2985796" y="1437798"/>
+            <a:ext cx="1685731" cy="0"/>
+          </a:xfrm>
+          <a:prstGeom prst="straightConnector1">
+            <a:avLst/>
+          </a:prstGeom>
+          <a:ln>
+            <a:tailEnd type="triangle"/>
+          </a:ln>
+        </p:spPr>
+        <p:style>
+          <a:lnRef idx="1">
+            <a:schemeClr val="accent1"/>
+          </a:lnRef>
+          <a:fillRef idx="0">
+            <a:schemeClr val="accent1"/>
+          </a:fillRef>
+          <a:effectRef idx="0">
+            <a:schemeClr val="accent1"/>
+          </a:effectRef>
+          <a:fontRef idx="minor">
+            <a:schemeClr val="tx1"/>
+          </a:fontRef>
+        </p:style>
+      </p:cxnSp>
     </p:spTree>
     <p:extLst>
       <p:ext uri="{BB962C8B-B14F-4D97-AF65-F5344CB8AC3E}">
